--- a/public/dokumentasi/TaskSchool.pptx
+++ b/public/dokumentasi/TaskSchool.pptx
@@ -9741,94 +9741,6 @@
       </p:pic>
       <p:sp>
         <p:nvSpPr>
-          <p:cNvPr id="8" name="Persegi panjang 7"/>
-          <p:cNvSpPr/>
-          <p:nvPr/>
-        </p:nvSpPr>
-        <p:spPr>
-          <a:xfrm>
-            <a:off x="6477000" y="2921000"/>
-            <a:ext cx="4445000" cy="2730500"/>
-          </a:xfrm>
-          <a:prstGeom prst="rect">
-            <a:avLst/>
-          </a:prstGeom>
-          <a:solidFill>
-            <a:srgbClr val="F8FAFC"/>
-          </a:solidFill>
-          <a:ln>
-            <a:solidFill>
-              <a:srgbClr val="CBD5E1"/>
-            </a:solidFill>
-          </a:ln>
-        </p:spPr>
-        <p:style>
-          <a:lnRef idx="2">
-            <a:schemeClr val="accent1">
-              <a:lumMod val="75000"/>
-            </a:schemeClr>
-          </a:lnRef>
-          <a:fillRef idx="1">
-            <a:schemeClr val="accent1"/>
-          </a:fillRef>
-          <a:effectRef idx="0">
-            <a:srgbClr val="FFFFFF"/>
-          </a:effectRef>
-          <a:fontRef idx="minor">
-            <a:schemeClr val="lt1"/>
-          </a:fontRef>
-        </p:style>
-        <p:txBody>
-          <a:bodyPr rtlCol="0" anchor="ctr"/>
-          <a:p>
-            <a:pPr algn="ctr"/>
-            <a:endParaRPr lang="id-ID" altLang="en-US"/>
-          </a:p>
-        </p:txBody>
-      </p:sp>
-      <p:sp>
-        <p:nvSpPr>
-          <p:cNvPr id="9" name="Kotak Teks 8"/>
-          <p:cNvSpPr txBox="1"/>
-          <p:nvPr/>
-        </p:nvSpPr>
-        <p:spPr>
-          <a:xfrm>
-            <a:off x="6794500" y="3810000"/>
-            <a:ext cx="3810000" cy="830580"/>
-          </a:xfrm>
-          <a:prstGeom prst="rect">
-            <a:avLst/>
-          </a:prstGeom>
-          <a:noFill/>
-        </p:spPr>
-        <p:txBody>
-          <a:bodyPr wrap="square" lIns="0" tIns="0" rIns="0" bIns="0" rtlCol="0" anchor="t">
-            <a:spAutoFit/>
-          </a:bodyPr>
-          <a:p>
-            <a:r>
-              <a:rPr lang="en-US" altLang="en-US" b="1">
-                <a:solidFill>
-                  <a:srgbClr val="64748B"/>
-                </a:solidFill>
-                <a:latin typeface="Arial" panose="020B0604020202020204" pitchFamily="34" charset="0"/>
-                <a:cs typeface="Arial" panose="020B0604020202020204" pitchFamily="34" charset="0"/>
-              </a:rPr>
-              <a:t>Screenshot repository GitHub ditempel pada slide ini.</a:t>
-            </a:r>
-            <a:endParaRPr lang="en-US" altLang="en-US" b="1">
-              <a:solidFill>
-                <a:srgbClr val="64748B"/>
-              </a:solidFill>
-              <a:latin typeface="Arial" panose="020B0604020202020204" pitchFamily="34" charset="0"/>
-              <a:cs typeface="Arial" panose="020B0604020202020204" pitchFamily="34" charset="0"/>
-            </a:endParaRPr>
-          </a:p>
-        </p:txBody>
-      </p:sp>
-      <p:sp>
-        <p:nvSpPr>
           <p:cNvPr id="11" name="Kotak Teks 10"/>
           <p:cNvSpPr txBox="1"/>
           <p:nvPr/>
@@ -9909,6 +9821,30 @@
           </a:p>
         </p:txBody>
       </p:sp>
+      <p:pic>
+        <p:nvPicPr>
+          <p:cNvPr id="14" name="Gambar 13"/>
+          <p:cNvPicPr>
+            <a:picLocks noChangeAspect="1"/>
+          </p:cNvPicPr>
+          <p:nvPr/>
+        </p:nvPicPr>
+        <p:blipFill>
+          <a:blip r:embed="rId2"/>
+          <a:stretch>
+            <a:fillRect/>
+          </a:stretch>
+        </p:blipFill>
+        <p:spPr>
+          <a:xfrm>
+            <a:off x="6604000" y="2921000"/>
+            <a:ext cx="5143500" cy="2731135"/>
+          </a:xfrm>
+          <a:prstGeom prst="rect">
+            <a:avLst/>
+          </a:prstGeom>
+        </p:spPr>
+      </p:pic>
     </p:spTree>
   </p:cSld>
   <p:clrMapOvr>
